--- a/figures/SuppFigModel/SuppFigModel.pptx
+++ b/figures/SuppFigModel/SuppFigModel.pptx
@@ -243,7 +243,7 @@
           <a:p>
             <a:fld id="{9B1CBD94-6899-E445-BE1B-2181BBCA6A94}" type="datetimeFigureOut">
               <a:rPr lang="en-US" smtClean="0"/>
-              <a:t>3/17/26</a:t>
+              <a:t>3/31/26</a:t>
             </a:fld>
             <a:endParaRPr lang="en-US"/>
           </a:p>
@@ -413,7 +413,7 @@
           <a:p>
             <a:fld id="{9B1CBD94-6899-E445-BE1B-2181BBCA6A94}" type="datetimeFigureOut">
               <a:rPr lang="en-US" smtClean="0"/>
-              <a:t>3/17/26</a:t>
+              <a:t>3/31/26</a:t>
             </a:fld>
             <a:endParaRPr lang="en-US"/>
           </a:p>
@@ -593,7 +593,7 @@
           <a:p>
             <a:fld id="{9B1CBD94-6899-E445-BE1B-2181BBCA6A94}" type="datetimeFigureOut">
               <a:rPr lang="en-US" smtClean="0"/>
-              <a:t>3/17/26</a:t>
+              <a:t>3/31/26</a:t>
             </a:fld>
             <a:endParaRPr lang="en-US"/>
           </a:p>
@@ -763,7 +763,7 @@
           <a:p>
             <a:fld id="{9B1CBD94-6899-E445-BE1B-2181BBCA6A94}" type="datetimeFigureOut">
               <a:rPr lang="en-US" smtClean="0"/>
-              <a:t>3/17/26</a:t>
+              <a:t>3/31/26</a:t>
             </a:fld>
             <a:endParaRPr lang="en-US"/>
           </a:p>
@@ -1009,7 +1009,7 @@
           <a:p>
             <a:fld id="{9B1CBD94-6899-E445-BE1B-2181BBCA6A94}" type="datetimeFigureOut">
               <a:rPr lang="en-US" smtClean="0"/>
-              <a:t>3/17/26</a:t>
+              <a:t>3/31/26</a:t>
             </a:fld>
             <a:endParaRPr lang="en-US"/>
           </a:p>
@@ -1241,7 +1241,7 @@
           <a:p>
             <a:fld id="{9B1CBD94-6899-E445-BE1B-2181BBCA6A94}" type="datetimeFigureOut">
               <a:rPr lang="en-US" smtClean="0"/>
-              <a:t>3/17/26</a:t>
+              <a:t>3/31/26</a:t>
             </a:fld>
             <a:endParaRPr lang="en-US"/>
           </a:p>
@@ -1608,7 +1608,7 @@
           <a:p>
             <a:fld id="{9B1CBD94-6899-E445-BE1B-2181BBCA6A94}" type="datetimeFigureOut">
               <a:rPr lang="en-US" smtClean="0"/>
-              <a:t>3/17/26</a:t>
+              <a:t>3/31/26</a:t>
             </a:fld>
             <a:endParaRPr lang="en-US"/>
           </a:p>
@@ -1726,7 +1726,7 @@
           <a:p>
             <a:fld id="{9B1CBD94-6899-E445-BE1B-2181BBCA6A94}" type="datetimeFigureOut">
               <a:rPr lang="en-US" smtClean="0"/>
-              <a:t>3/17/26</a:t>
+              <a:t>3/31/26</a:t>
             </a:fld>
             <a:endParaRPr lang="en-US"/>
           </a:p>
@@ -1821,7 +1821,7 @@
           <a:p>
             <a:fld id="{9B1CBD94-6899-E445-BE1B-2181BBCA6A94}" type="datetimeFigureOut">
               <a:rPr lang="en-US" smtClean="0"/>
-              <a:t>3/17/26</a:t>
+              <a:t>3/31/26</a:t>
             </a:fld>
             <a:endParaRPr lang="en-US"/>
           </a:p>
@@ -2098,7 +2098,7 @@
           <a:p>
             <a:fld id="{9B1CBD94-6899-E445-BE1B-2181BBCA6A94}" type="datetimeFigureOut">
               <a:rPr lang="en-US" smtClean="0"/>
-              <a:t>3/17/26</a:t>
+              <a:t>3/31/26</a:t>
             </a:fld>
             <a:endParaRPr lang="en-US"/>
           </a:p>
@@ -2355,7 +2355,7 @@
           <a:p>
             <a:fld id="{9B1CBD94-6899-E445-BE1B-2181BBCA6A94}" type="datetimeFigureOut">
               <a:rPr lang="en-US" smtClean="0"/>
-              <a:t>3/17/26</a:t>
+              <a:t>3/31/26</a:t>
             </a:fld>
             <a:endParaRPr lang="en-US"/>
           </a:p>
@@ -2568,7 +2568,7 @@
           <a:p>
             <a:fld id="{9B1CBD94-6899-E445-BE1B-2181BBCA6A94}" type="datetimeFigureOut">
               <a:rPr lang="en-US" smtClean="0"/>
-              <a:t>3/17/26</a:t>
+              <a:t>3/31/26</a:t>
             </a:fld>
             <a:endParaRPr lang="en-US"/>
           </a:p>
@@ -4761,7 +4761,9 @@
           </a:prstGeom>
           <a:ln w="19050">
             <a:solidFill>
-              <a:schemeClr val="accent2"/>
+              <a:schemeClr val="bg1">
+                <a:lumMod val="75000"/>
+              </a:schemeClr>
             </a:solidFill>
             <a:prstDash val="sysDot"/>
             <a:tailEnd type="triangle"/>
@@ -4806,7 +4808,9 @@
           </a:prstGeom>
           <a:ln w="19050">
             <a:solidFill>
-              <a:srgbClr val="0350E1"/>
+              <a:schemeClr val="bg1">
+                <a:lumMod val="75000"/>
+              </a:schemeClr>
             </a:solidFill>
             <a:prstDash val="sysDot"/>
             <a:tailEnd type="triangle"/>
@@ -4850,20 +4854,11 @@
             <a:avLst/>
           </a:prstGeom>
           <a:ln w="19050">
-            <a:gradFill>
-              <a:gsLst>
-                <a:gs pos="0">
-                  <a:srgbClr val="F6A21D"/>
-                </a:gs>
-                <a:gs pos="50000">
-                  <a:srgbClr val="AA4EF1"/>
-                </a:gs>
-                <a:gs pos="100000">
-                  <a:srgbClr val="0350E1"/>
-                </a:gs>
-              </a:gsLst>
-              <a:lin ang="6000000" scaled="0"/>
-            </a:gradFill>
+            <a:solidFill>
+              <a:schemeClr val="bg1">
+                <a:lumMod val="75000"/>
+              </a:schemeClr>
+            </a:solidFill>
             <a:prstDash val="sysDot"/>
             <a:headEnd type="triangle"/>
             <a:tailEnd type="triangle"/>
